--- a/parallel_computing .pptx
+++ b/parallel_computing .pptx
@@ -5,7 +5,7 @@
     <p:sldMasterId id="2147483648" r:id="rId1"/>
   </p:sldMasterIdLst>
   <p:notesMasterIdLst>
-    <p:notesMasterId r:id="rId12"/>
+    <p:notesMasterId r:id="rId13"/>
   </p:notesMasterIdLst>
   <p:sldIdLst>
     <p:sldId id="256" r:id="rId2"/>
@@ -18,6 +18,7 @@
     <p:sldId id="262" r:id="rId9"/>
     <p:sldId id="263" r:id="rId10"/>
     <p:sldId id="264" r:id="rId11"/>
+    <p:sldId id="266" r:id="rId12"/>
   </p:sldIdLst>
   <p:sldSz cx="9144000" cy="5143500" type="screen16x9"/>
   <p:notesSz cx="5143500" cy="9144000"/>
@@ -405,6 +406,174 @@
     <p:extLst>
       <p:ext uri="{BB962C8B-B14F-4D97-AF65-F5344CB8AC3E}">
         <p14:creationId xmlns:p14="http://schemas.microsoft.com/office/powerpoint/2010/main" val="1024086991"/>
+      </p:ext>
+    </p:extLst>
+  </p:cSld>
+  <p:clrMapOvr>
+    <a:masterClrMapping/>
+  </p:clrMapOvr>
+</p:notes>
+</file>
+
+<file path=ppt/notesSlides/notesSlide11.xml><?xml version="1.0" encoding="utf-8"?>
+<p:notes xmlns:a="http://schemas.openxmlformats.org/drawingml/2006/main" xmlns:r="http://schemas.openxmlformats.org/officeDocument/2006/relationships" xmlns:p="http://schemas.openxmlformats.org/presentationml/2006/main">
+  <p:cSld>
+    <p:spTree>
+      <p:nvGrpSpPr>
+        <p:cNvPr id="1" name="">
+          <a:extLst>
+            <a:ext uri="{FF2B5EF4-FFF2-40B4-BE49-F238E27FC236}">
+              <a16:creationId xmlns:a16="http://schemas.microsoft.com/office/drawing/2014/main" id="{4C172CA6-25F5-7201-318A-4691D3C9A0AD}"/>
+            </a:ext>
+          </a:extLst>
+        </p:cNvPr>
+        <p:cNvGrpSpPr/>
+        <p:nvPr/>
+      </p:nvGrpSpPr>
+      <p:grpSpPr>
+        <a:xfrm>
+          <a:off x="0" y="0"/>
+          <a:ext cx="0" cy="0"/>
+          <a:chOff x="0" y="0"/>
+          <a:chExt cx="0" cy="0"/>
+        </a:xfrm>
+      </p:grpSpPr>
+      <p:sp>
+        <p:nvSpPr>
+          <p:cNvPr id="2" name="Slide Image Placeholder 1">
+            <a:extLst>
+              <a:ext uri="{FF2B5EF4-FFF2-40B4-BE49-F238E27FC236}">
+                <a16:creationId xmlns:a16="http://schemas.microsoft.com/office/drawing/2014/main" id="{D06F8A19-48A4-8E8C-B5E9-CC60047A1DF8}"/>
+              </a:ext>
+            </a:extLst>
+          </p:cNvPr>
+          <p:cNvSpPr>
+            <a:spLocks noGrp="1" noRot="1" noChangeAspect="1"/>
+          </p:cNvSpPr>
+          <p:nvPr>
+            <p:ph type="sldImg"/>
+          </p:nvPr>
+        </p:nvSpPr>
+        <p:spPr/>
+      </p:sp>
+      <p:sp>
+        <p:nvSpPr>
+          <p:cNvPr id="3" name="Notes Placeholder 2">
+            <a:extLst>
+              <a:ext uri="{FF2B5EF4-FFF2-40B4-BE49-F238E27FC236}">
+                <a16:creationId xmlns:a16="http://schemas.microsoft.com/office/drawing/2014/main" id="{3D526C38-CF0F-6659-2E1D-5965ADC4E5B8}"/>
+              </a:ext>
+            </a:extLst>
+          </p:cNvPr>
+          <p:cNvSpPr>
+            <a:spLocks noGrp="1"/>
+          </p:cNvSpPr>
+          <p:nvPr>
+            <p:ph type="body" idx="1"/>
+          </p:nvPr>
+        </p:nvSpPr>
+        <p:spPr/>
+        <p:txBody>
+          <a:bodyPr/>
+          <a:lstStyle/>
+          <a:p>
+            <a:endParaRPr lang="en-US" dirty="0"/>
+          </a:p>
+        </p:txBody>
+      </p:sp>
+      <p:sp>
+        <p:nvSpPr>
+          <p:cNvPr id="4" name="Slide Number Placeholder 3">
+            <a:extLst>
+              <a:ext uri="{FF2B5EF4-FFF2-40B4-BE49-F238E27FC236}">
+                <a16:creationId xmlns:a16="http://schemas.microsoft.com/office/drawing/2014/main" id="{B23CE534-76E1-994B-9ACA-E8B78CD6FD05}"/>
+              </a:ext>
+            </a:extLst>
+          </p:cNvPr>
+          <p:cNvSpPr>
+            <a:spLocks noGrp="1"/>
+          </p:cNvSpPr>
+          <p:nvPr>
+            <p:ph type="sldNum" sz="quarter" idx="10"/>
+          </p:nvPr>
+        </p:nvSpPr>
+        <p:spPr/>
+        <p:txBody>
+          <a:bodyPr/>
+          <a:lstStyle/>
+          <a:p>
+            <a:pPr marL="0" marR="0" lvl="0" indent="0" algn="l" defTabSz="914400" rtl="0" eaLnBrk="1" fontAlgn="auto" latinLnBrk="0" hangingPunct="1">
+              <a:lnSpc>
+                <a:spcPct val="100000"/>
+              </a:lnSpc>
+              <a:spcBef>
+                <a:spcPts val="0"/>
+              </a:spcBef>
+              <a:spcAft>
+                <a:spcPts val="0"/>
+              </a:spcAft>
+              <a:buClrTx/>
+              <a:buSzTx/>
+              <a:buFontTx/>
+              <a:buNone/>
+              <a:tabLst/>
+              <a:defRPr/>
+            </a:pPr>
+            <a:fld id="{F7021451-1387-4CA6-816F-3879F97B5CBC}" type="slidenum">
+              <a:rPr kumimoji="0" lang="en-US" sz="1800" b="0" i="0" u="none" strike="noStrike" kern="1200" cap="none" spc="0" normalizeH="0" baseline="0" noProof="0">
+                <a:ln>
+                  <a:noFill/>
+                </a:ln>
+                <a:solidFill>
+                  <a:prstClr val="black"/>
+                </a:solidFill>
+                <a:effectLst/>
+                <a:uLnTx/>
+                <a:uFillTx/>
+                <a:latin typeface="Aptos" panose="02110004020202020204"/>
+                <a:ea typeface="+mn-ea"/>
+                <a:cs typeface="+mn-cs"/>
+              </a:rPr>
+              <a:pPr marL="0" marR="0" lvl="0" indent="0" algn="l" defTabSz="914400" rtl="0" eaLnBrk="1" fontAlgn="auto" latinLnBrk="0" hangingPunct="1">
+                <a:lnSpc>
+                  <a:spcPct val="100000"/>
+                </a:lnSpc>
+                <a:spcBef>
+                  <a:spcPts val="0"/>
+                </a:spcBef>
+                <a:spcAft>
+                  <a:spcPts val="0"/>
+                </a:spcAft>
+                <a:buClrTx/>
+                <a:buSzTx/>
+                <a:buFontTx/>
+                <a:buNone/>
+                <a:tabLst/>
+                <a:defRPr/>
+              </a:pPr>
+              <a:t>11</a:t>
+            </a:fld>
+            <a:endParaRPr kumimoji="0" lang="en-US" sz="1800" b="0" i="0" u="none" strike="noStrike" kern="1200" cap="none" spc="0" normalizeH="0" baseline="0" noProof="0">
+              <a:ln>
+                <a:noFill/>
+              </a:ln>
+              <a:solidFill>
+                <a:prstClr val="black"/>
+              </a:solidFill>
+              <a:effectLst/>
+              <a:uLnTx/>
+              <a:uFillTx/>
+              <a:latin typeface="Aptos" panose="02110004020202020204"/>
+              <a:ea typeface="+mn-ea"/>
+              <a:cs typeface="+mn-cs"/>
+            </a:endParaRPr>
+          </a:p>
+        </p:txBody>
+      </p:sp>
+    </p:spTree>
+    <p:extLst>
+      <p:ext uri="{BB962C8B-B14F-4D97-AF65-F5344CB8AC3E}">
+        <p14:creationId xmlns:p14="http://schemas.microsoft.com/office/powerpoint/2010/main" val="624318309"/>
       </p:ext>
     </p:extLst>
   </p:cSld>
@@ -2290,13 +2459,13 @@
   <p:clrMapOvr>
     <a:masterClrMapping/>
   </p:clrMapOvr>
-  <mc:AlternateContent xmlns:mc="http://schemas.openxmlformats.org/markup-compatibility/2006">
-    <mc:Choice xmlns:p14="http://schemas.microsoft.com/office/powerpoint/2010/main" Requires="p14">
+  <mc:AlternateContent xmlns:mc="http://schemas.openxmlformats.org/markup-compatibility/2006" xmlns:p14="http://schemas.microsoft.com/office/powerpoint/2010/main">
+    <mc:Choice Requires="p14">
       <p:transition spd="slow">
         <p14:prism isContent="1" isInverted="1"/>
       </p:transition>
     </mc:Choice>
-    <mc:Fallback>
+    <mc:Fallback xmlns="">
       <p:transition spd="slow">
         <p:fade/>
       </p:transition>
@@ -3484,18 +3653,1526 @@
   <p:clrMapOvr>
     <a:masterClrMapping/>
   </p:clrMapOvr>
-  <mc:AlternateContent xmlns:mc="http://schemas.openxmlformats.org/markup-compatibility/2006">
-    <mc:Choice xmlns:p14="http://schemas.microsoft.com/office/powerpoint/2010/main" Requires="p14">
+  <mc:AlternateContent xmlns:mc="http://schemas.openxmlformats.org/markup-compatibility/2006" xmlns:p14="http://schemas.microsoft.com/office/powerpoint/2010/main">
+    <mc:Choice Requires="p14">
       <p:transition spd="slow">
         <p14:prism isContent="1" isInverted="1"/>
       </p:transition>
     </mc:Choice>
-    <mc:Fallback>
+    <mc:Fallback xmlns="">
       <p:transition spd="slow">
         <p:fade/>
       </p:transition>
     </mc:Fallback>
   </mc:AlternateContent>
+</p:sld>
+</file>
+
+<file path=ppt/slides/slide11.xml><?xml version="1.0" encoding="utf-8"?>
+<p:sld xmlns:a="http://schemas.openxmlformats.org/drawingml/2006/main" xmlns:r="http://schemas.openxmlformats.org/officeDocument/2006/relationships" xmlns:p="http://schemas.openxmlformats.org/presentationml/2006/main">
+  <p:cSld>
+    <p:bg>
+      <p:bgPr>
+        <a:solidFill>
+          <a:srgbClr val="0D1117"/>
+        </a:solidFill>
+        <a:effectLst/>
+      </p:bgPr>
+    </p:bg>
+    <p:spTree>
+      <p:nvGrpSpPr>
+        <p:cNvPr id="1" name="">
+          <a:extLst>
+            <a:ext uri="{FF2B5EF4-FFF2-40B4-BE49-F238E27FC236}">
+              <a16:creationId xmlns:a16="http://schemas.microsoft.com/office/drawing/2014/main" id="{1E9EB2A1-9203-0F29-805E-B053BD902C4D}"/>
+            </a:ext>
+          </a:extLst>
+        </p:cNvPr>
+        <p:cNvGrpSpPr/>
+        <p:nvPr/>
+      </p:nvGrpSpPr>
+      <p:grpSpPr>
+        <a:xfrm>
+          <a:off x="0" y="0"/>
+          <a:ext cx="0" cy="0"/>
+          <a:chOff x="0" y="0"/>
+          <a:chExt cx="0" cy="0"/>
+        </a:xfrm>
+      </p:grpSpPr>
+      <p:sp>
+        <p:nvSpPr>
+          <p:cNvPr id="2" name="Text 0">
+            <a:extLst>
+              <a:ext uri="{FF2B5EF4-FFF2-40B4-BE49-F238E27FC236}">
+                <a16:creationId xmlns:a16="http://schemas.microsoft.com/office/drawing/2014/main" id="{F1FFC21D-D470-96D0-D28E-C3DFC5CCD287}"/>
+              </a:ext>
+            </a:extLst>
+          </p:cNvPr>
+          <p:cNvSpPr/>
+          <p:nvPr/>
+        </p:nvSpPr>
+        <p:spPr>
+          <a:xfrm>
+            <a:off x="411480" y="182880"/>
+            <a:ext cx="6858000" cy="566928"/>
+          </a:xfrm>
+          <a:prstGeom prst="rect">
+            <a:avLst/>
+          </a:prstGeom>
+          <a:noFill/>
+          <a:ln/>
+        </p:spPr>
+        <p:txBody>
+          <a:bodyPr wrap="square" lIns="0" tIns="0" rIns="0" bIns="0" rtlCol="0" anchor="ctr"/>
+          <a:lstStyle/>
+          <a:p>
+            <a:pPr marL="0" marR="0" lvl="0" indent="0" algn="l" defTabSz="914400" rtl="0" eaLnBrk="1" fontAlgn="auto" latinLnBrk="0" hangingPunct="1">
+              <a:lnSpc>
+                <a:spcPct val="100000"/>
+              </a:lnSpc>
+              <a:spcBef>
+                <a:spcPts val="0"/>
+              </a:spcBef>
+              <a:spcAft>
+                <a:spcPts val="0"/>
+              </a:spcAft>
+              <a:buClrTx/>
+              <a:buSzTx/>
+              <a:buFontTx/>
+              <a:buNone/>
+              <a:tabLst/>
+              <a:defRPr/>
+            </a:pPr>
+            <a:r>
+              <a:rPr kumimoji="0" lang="en-US" sz="2400" b="1" i="0" u="none" strike="noStrike" kern="1200" cap="none" spc="0" normalizeH="0" baseline="0" noProof="0" dirty="0">
+                <a:ln>
+                  <a:noFill/>
+                </a:ln>
+                <a:solidFill>
+                  <a:srgbClr val="F0F6FC"/>
+                </a:solidFill>
+                <a:effectLst/>
+                <a:uLnTx/>
+                <a:uFillTx/>
+                <a:latin typeface="Trebuchet MS" pitchFamily="34" charset="0"/>
+                <a:ea typeface="Trebuchet MS" pitchFamily="34" charset="-122"/>
+                <a:cs typeface="Trebuchet MS" pitchFamily="34" charset="-120"/>
+              </a:rPr>
+              <a:t>Hands-On Example</a:t>
+            </a:r>
+            <a:endParaRPr kumimoji="0" lang="en-US" sz="2400" b="0" i="0" u="none" strike="noStrike" kern="1200" cap="none" spc="0" normalizeH="0" baseline="0" noProof="0" dirty="0">
+              <a:ln>
+                <a:noFill/>
+              </a:ln>
+              <a:solidFill>
+                <a:prstClr val="black"/>
+              </a:solidFill>
+              <a:effectLst/>
+              <a:uLnTx/>
+              <a:uFillTx/>
+              <a:latin typeface="Calibri" panose="020F0502020204030204"/>
+              <a:ea typeface="+mn-ea"/>
+              <a:cs typeface="+mn-cs"/>
+            </a:endParaRPr>
+          </a:p>
+        </p:txBody>
+      </p:sp>
+      <p:grpSp>
+        <p:nvGrpSpPr>
+          <p:cNvPr id="55" name="Group 54">
+            <a:extLst>
+              <a:ext uri="{FF2B5EF4-FFF2-40B4-BE49-F238E27FC236}">
+                <a16:creationId xmlns:a16="http://schemas.microsoft.com/office/drawing/2014/main" id="{76575C77-4584-067C-DFF7-21C9A992E7B3}"/>
+              </a:ext>
+            </a:extLst>
+          </p:cNvPr>
+          <p:cNvGrpSpPr/>
+          <p:nvPr/>
+        </p:nvGrpSpPr>
+        <p:grpSpPr>
+          <a:xfrm>
+            <a:off x="272692" y="989507"/>
+            <a:ext cx="8321040" cy="700500"/>
+            <a:chOff x="272692" y="1071154"/>
+            <a:chExt cx="8321040" cy="1024128"/>
+          </a:xfrm>
+        </p:grpSpPr>
+        <p:sp>
+          <p:nvSpPr>
+            <p:cNvPr id="3" name="Shape 12">
+              <a:extLst>
+                <a:ext uri="{FF2B5EF4-FFF2-40B4-BE49-F238E27FC236}">
+                  <a16:creationId xmlns:a16="http://schemas.microsoft.com/office/drawing/2014/main" id="{096F12D2-07DA-FBBE-612D-26E0857118B0}"/>
+                </a:ext>
+              </a:extLst>
+            </p:cNvPr>
+            <p:cNvSpPr/>
+            <p:nvPr/>
+          </p:nvSpPr>
+          <p:spPr>
+            <a:xfrm>
+              <a:off x="272692" y="1071154"/>
+              <a:ext cx="8321040" cy="1024128"/>
+            </a:xfrm>
+            <a:prstGeom prst="rect">
+              <a:avLst/>
+            </a:prstGeom>
+            <a:solidFill>
+              <a:srgbClr val="161B22"/>
+            </a:solidFill>
+            <a:ln w="19050">
+              <a:solidFill>
+                <a:srgbClr val="22D3EE"/>
+              </a:solidFill>
+              <a:prstDash val="solid"/>
+            </a:ln>
+            <a:effectLst>
+              <a:outerShdw blurRad="152400" dist="38100" dir="8100000" algn="bl" rotWithShape="0">
+                <a:srgbClr val="000000">
+                  <a:alpha val="40000"/>
+                </a:srgbClr>
+              </a:outerShdw>
+            </a:effectLst>
+          </p:spPr>
+          <p:txBody>
+            <a:bodyPr/>
+            <a:lstStyle/>
+            <a:p>
+              <a:endParaRPr lang="en-NO" dirty="0"/>
+            </a:p>
+          </p:txBody>
+        </p:sp>
+        <p:sp>
+          <p:nvSpPr>
+            <p:cNvPr id="4" name="Shape 13">
+              <a:extLst>
+                <a:ext uri="{FF2B5EF4-FFF2-40B4-BE49-F238E27FC236}">
+                  <a16:creationId xmlns:a16="http://schemas.microsoft.com/office/drawing/2014/main" id="{071AD85A-F4F8-F142-DB73-B90DEEB40F4A}"/>
+                </a:ext>
+              </a:extLst>
+            </p:cNvPr>
+            <p:cNvSpPr/>
+            <p:nvPr/>
+          </p:nvSpPr>
+          <p:spPr>
+            <a:xfrm>
+              <a:off x="272692" y="1071154"/>
+              <a:ext cx="54864" cy="1024128"/>
+            </a:xfrm>
+            <a:prstGeom prst="rect">
+              <a:avLst/>
+            </a:prstGeom>
+            <a:solidFill>
+              <a:srgbClr val="22D3EE"/>
+            </a:solidFill>
+            <a:ln w="12700">
+              <a:solidFill>
+                <a:srgbClr val="22D3EE"/>
+              </a:solidFill>
+              <a:prstDash val="solid"/>
+            </a:ln>
+          </p:spPr>
+          <p:txBody>
+            <a:bodyPr/>
+            <a:lstStyle/>
+            <a:p>
+              <a:endParaRPr lang="en-NO"/>
+            </a:p>
+          </p:txBody>
+        </p:sp>
+        <p:sp>
+          <p:nvSpPr>
+            <p:cNvPr id="11" name="Text 14">
+              <a:extLst>
+                <a:ext uri="{FF2B5EF4-FFF2-40B4-BE49-F238E27FC236}">
+                  <a16:creationId xmlns:a16="http://schemas.microsoft.com/office/drawing/2014/main" id="{89BCF350-27EA-175B-6C0A-A5A32235B4FD}"/>
+                </a:ext>
+              </a:extLst>
+            </p:cNvPr>
+            <p:cNvSpPr/>
+            <p:nvPr/>
+          </p:nvSpPr>
+          <p:spPr>
+            <a:xfrm>
+              <a:off x="428140" y="1116874"/>
+              <a:ext cx="3063240" cy="292608"/>
+            </a:xfrm>
+            <a:prstGeom prst="rect">
+              <a:avLst/>
+            </a:prstGeom>
+            <a:noFill/>
+            <a:ln/>
+          </p:spPr>
+          <p:txBody>
+            <a:bodyPr wrap="square" lIns="0" tIns="0" rIns="0" bIns="0" rtlCol="0" anchor="ctr"/>
+            <a:lstStyle/>
+            <a:p>
+              <a:r>
+                <a:rPr lang="en-US" sz="1300" b="1" dirty="0">
+                  <a:solidFill>
+                    <a:srgbClr val="22D3EE"/>
+                  </a:solidFill>
+                  <a:latin typeface="Trebuchet MS" pitchFamily="34" charset="0"/>
+                  <a:ea typeface="Trebuchet MS" pitchFamily="34" charset="-122"/>
+                  <a:cs typeface="Trebuchet MS" pitchFamily="34" charset="-120"/>
+                </a:rPr>
+                <a:t>Estimation of Pi </a:t>
+              </a:r>
+              <a:endParaRPr lang="en-US" sz="1300" dirty="0"/>
+            </a:p>
+          </p:txBody>
+        </p:sp>
+        <p:sp>
+          <p:nvSpPr>
+            <p:cNvPr id="12" name="Text 15">
+              <a:extLst>
+                <a:ext uri="{FF2B5EF4-FFF2-40B4-BE49-F238E27FC236}">
+                  <a16:creationId xmlns:a16="http://schemas.microsoft.com/office/drawing/2014/main" id="{9471D959-B682-D208-16B2-EBAE0A861759}"/>
+                </a:ext>
+              </a:extLst>
+            </p:cNvPr>
+            <p:cNvSpPr/>
+            <p:nvPr/>
+          </p:nvSpPr>
+          <p:spPr>
+            <a:xfrm>
+              <a:off x="428140" y="1436914"/>
+              <a:ext cx="8038224" cy="594360"/>
+            </a:xfrm>
+            <a:prstGeom prst="rect">
+              <a:avLst/>
+            </a:prstGeom>
+            <a:noFill/>
+            <a:ln/>
+          </p:spPr>
+          <p:txBody>
+            <a:bodyPr wrap="square" lIns="0" tIns="0" rIns="0" bIns="0" rtlCol="0" anchor="ctr"/>
+            <a:lstStyle/>
+            <a:p>
+              <a:r>
+                <a:rPr lang="en-US" sz="1100" dirty="0">
+                  <a:solidFill>
+                    <a:srgbClr val="8B949E"/>
+                  </a:solidFill>
+                  <a:latin typeface="Calibri" pitchFamily="34" charset="0"/>
+                  <a:ea typeface="Calibri" pitchFamily="34" charset="-122"/>
+                  <a:cs typeface="Calibri" pitchFamily="34" charset="-120"/>
+                </a:rPr>
+                <a:t>The idea is to simulate random (x, y) points in a 2-D plane with domain as a square of side 2r units centered on (0,0)</a:t>
+              </a:r>
+              <a:endParaRPr lang="en-US" sz="1100" dirty="0"/>
+            </a:p>
+          </p:txBody>
+        </p:sp>
+      </p:grpSp>
+      <p:pic>
+        <p:nvPicPr>
+          <p:cNvPr id="1024" name="Picture 1023">
+            <a:extLst>
+              <a:ext uri="{FF2B5EF4-FFF2-40B4-BE49-F238E27FC236}">
+                <a16:creationId xmlns:a16="http://schemas.microsoft.com/office/drawing/2014/main" id="{54B476DF-F193-987B-5FDF-9ABCF9D924B5}"/>
+              </a:ext>
+            </a:extLst>
+          </p:cNvPr>
+          <p:cNvPicPr>
+            <a:picLocks noChangeAspect="1"/>
+          </p:cNvPicPr>
+          <p:nvPr/>
+        </p:nvPicPr>
+        <p:blipFill>
+          <a:blip r:embed="rId3"/>
+          <a:stretch>
+            <a:fillRect/>
+          </a:stretch>
+        </p:blipFill>
+        <p:spPr>
+          <a:xfrm>
+            <a:off x="272692" y="1929706"/>
+            <a:ext cx="6184900" cy="2857500"/>
+          </a:xfrm>
+          <a:prstGeom prst="rect">
+            <a:avLst/>
+          </a:prstGeom>
+        </p:spPr>
+      </p:pic>
+      <mc:AlternateContent xmlns:mc="http://schemas.openxmlformats.org/markup-compatibility/2006">
+        <mc:Choice xmlns:a14="http://schemas.microsoft.com/office/drawing/2010/main" Requires="a14">
+          <p:sp>
+            <p:nvSpPr>
+              <p:cNvPr id="1028" name="TextBox 1027">
+                <a:extLst>
+                  <a:ext uri="{FF2B5EF4-FFF2-40B4-BE49-F238E27FC236}">
+                    <a16:creationId xmlns:a16="http://schemas.microsoft.com/office/drawing/2014/main" id="{861F86CA-26DA-1F39-CB96-7627EE903C76}"/>
+                  </a:ext>
+                </a:extLst>
+              </p:cNvPr>
+              <p:cNvSpPr txBox="1"/>
+              <p:nvPr/>
+            </p:nvSpPr>
+            <p:spPr>
+              <a:xfrm>
+                <a:off x="5944414" y="3546308"/>
+                <a:ext cx="2650132" cy="367986"/>
+              </a:xfrm>
+              <a:prstGeom prst="rect">
+                <a:avLst/>
+              </a:prstGeom>
+              <a:noFill/>
+            </p:spPr>
+            <p:txBody>
+              <a:bodyPr wrap="square" lIns="0" tIns="0" rIns="0" bIns="0" rtlCol="0">
+                <a:spAutoFit/>
+              </a:bodyPr>
+              <a:lstStyle/>
+              <a:p>
+                <a:pPr/>
+                <a14:m>
+                  <m:oMathPara xmlns:m="http://schemas.openxmlformats.org/officeDocument/2006/math">
+                    <m:oMathParaPr>
+                      <m:jc m:val="left"/>
+                    </m:oMathParaPr>
+                    <m:oMath xmlns:m="http://schemas.openxmlformats.org/officeDocument/2006/math">
+                      <m:f>
+                        <m:fPr>
+                          <m:ctrlPr>
+                            <a:rPr lang="en-NO" sz="1100">
+                              <a:solidFill>
+                                <a:srgbClr val="8B949E"/>
+                              </a:solidFill>
+                              <a:latin typeface="Calibri" pitchFamily="34" charset="0"/>
+                              <a:ea typeface="Calibri" pitchFamily="34" charset="-122"/>
+                              <a:cs typeface="Calibri" pitchFamily="34" charset="-120"/>
+                            </a:rPr>
+                          </m:ctrlPr>
+                        </m:fPr>
+                        <m:num>
+                          <m:r>
+                            <m:rPr>
+                              <m:nor/>
+                            </m:rPr>
+                            <a:rPr lang="en-NO" sz="1100">
+                              <a:solidFill>
+                                <a:srgbClr val="8B949E"/>
+                              </a:solidFill>
+                              <a:latin typeface="Calibri" pitchFamily="34" charset="0"/>
+                              <a:ea typeface="Calibri" pitchFamily="34" charset="-122"/>
+                              <a:cs typeface="Calibri" pitchFamily="34" charset="-120"/>
+                            </a:rPr>
+                            <m:t>area</m:t>
+                          </m:r>
+                          <m:r>
+                            <m:rPr>
+                              <m:nor/>
+                            </m:rPr>
+                            <a:rPr lang="en-NO" sz="1100">
+                              <a:solidFill>
+                                <a:srgbClr val="8B949E"/>
+                              </a:solidFill>
+                              <a:latin typeface="Calibri" pitchFamily="34" charset="0"/>
+                              <a:ea typeface="Calibri" pitchFamily="34" charset="-122"/>
+                              <a:cs typeface="Calibri" pitchFamily="34" charset="-120"/>
+                            </a:rPr>
+                            <m:t> </m:t>
+                          </m:r>
+                          <m:r>
+                            <m:rPr>
+                              <m:nor/>
+                            </m:rPr>
+                            <a:rPr lang="en-NO" sz="1100">
+                              <a:solidFill>
+                                <a:srgbClr val="8B949E"/>
+                              </a:solidFill>
+                              <a:latin typeface="Calibri" pitchFamily="34" charset="0"/>
+                              <a:ea typeface="Calibri" pitchFamily="34" charset="-122"/>
+                              <a:cs typeface="Calibri" pitchFamily="34" charset="-120"/>
+                            </a:rPr>
+                            <m:t>of</m:t>
+                          </m:r>
+                          <m:r>
+                            <m:rPr>
+                              <m:nor/>
+                            </m:rPr>
+                            <a:rPr lang="en-NO" sz="1100">
+                              <a:solidFill>
+                                <a:srgbClr val="8B949E"/>
+                              </a:solidFill>
+                              <a:latin typeface="Calibri" pitchFamily="34" charset="0"/>
+                              <a:ea typeface="Calibri" pitchFamily="34" charset="-122"/>
+                              <a:cs typeface="Calibri" pitchFamily="34" charset="-120"/>
+                            </a:rPr>
+                            <m:t> </m:t>
+                          </m:r>
+                          <m:r>
+                            <m:rPr>
+                              <m:nor/>
+                            </m:rPr>
+                            <a:rPr lang="en-NO" sz="1100">
+                              <a:solidFill>
+                                <a:srgbClr val="8B949E"/>
+                              </a:solidFill>
+                              <a:latin typeface="Calibri" pitchFamily="34" charset="0"/>
+                              <a:ea typeface="Calibri" pitchFamily="34" charset="-122"/>
+                              <a:cs typeface="Calibri" pitchFamily="34" charset="-120"/>
+                            </a:rPr>
+                            <m:t>the</m:t>
+                          </m:r>
+                          <m:r>
+                            <m:rPr>
+                              <m:nor/>
+                            </m:rPr>
+                            <a:rPr lang="en-NO" sz="1100">
+                              <a:solidFill>
+                                <a:srgbClr val="8B949E"/>
+                              </a:solidFill>
+                              <a:latin typeface="Calibri" pitchFamily="34" charset="0"/>
+                              <a:ea typeface="Calibri" pitchFamily="34" charset="-122"/>
+                              <a:cs typeface="Calibri" pitchFamily="34" charset="-120"/>
+                            </a:rPr>
+                            <m:t> </m:t>
+                          </m:r>
+                          <m:r>
+                            <m:rPr>
+                              <m:nor/>
+                            </m:rPr>
+                            <a:rPr lang="en-NO" sz="1100">
+                              <a:solidFill>
+                                <a:srgbClr val="8B949E"/>
+                              </a:solidFill>
+                              <a:latin typeface="Calibri" pitchFamily="34" charset="0"/>
+                              <a:ea typeface="Calibri" pitchFamily="34" charset="-122"/>
+                              <a:cs typeface="Calibri" pitchFamily="34" charset="-120"/>
+                            </a:rPr>
+                            <m:t>circle</m:t>
+                          </m:r>
+                        </m:num>
+                        <m:den>
+                          <m:r>
+                            <m:rPr>
+                              <m:nor/>
+                            </m:rPr>
+                            <a:rPr lang="en-NO" sz="1100">
+                              <a:solidFill>
+                                <a:srgbClr val="8B949E"/>
+                              </a:solidFill>
+                              <a:latin typeface="Calibri" pitchFamily="34" charset="0"/>
+                              <a:ea typeface="Calibri" pitchFamily="34" charset="-122"/>
+                              <a:cs typeface="Calibri" pitchFamily="34" charset="-120"/>
+                            </a:rPr>
+                            <m:t>area</m:t>
+                          </m:r>
+                          <m:r>
+                            <m:rPr>
+                              <m:nor/>
+                            </m:rPr>
+                            <a:rPr lang="en-NO" sz="1100">
+                              <a:solidFill>
+                                <a:srgbClr val="8B949E"/>
+                              </a:solidFill>
+                              <a:latin typeface="Calibri" pitchFamily="34" charset="0"/>
+                              <a:ea typeface="Calibri" pitchFamily="34" charset="-122"/>
+                              <a:cs typeface="Calibri" pitchFamily="34" charset="-120"/>
+                            </a:rPr>
+                            <m:t> </m:t>
+                          </m:r>
+                          <m:r>
+                            <m:rPr>
+                              <m:nor/>
+                            </m:rPr>
+                            <a:rPr lang="en-NO" sz="1100">
+                              <a:solidFill>
+                                <a:srgbClr val="8B949E"/>
+                              </a:solidFill>
+                              <a:latin typeface="Calibri" pitchFamily="34" charset="0"/>
+                              <a:ea typeface="Calibri" pitchFamily="34" charset="-122"/>
+                              <a:cs typeface="Calibri" pitchFamily="34" charset="-120"/>
+                            </a:rPr>
+                            <m:t>of</m:t>
+                          </m:r>
+                          <m:r>
+                            <m:rPr>
+                              <m:nor/>
+                            </m:rPr>
+                            <a:rPr lang="en-NO" sz="1100">
+                              <a:solidFill>
+                                <a:srgbClr val="8B949E"/>
+                              </a:solidFill>
+                              <a:latin typeface="Calibri" pitchFamily="34" charset="0"/>
+                              <a:ea typeface="Calibri" pitchFamily="34" charset="-122"/>
+                              <a:cs typeface="Calibri" pitchFamily="34" charset="-120"/>
+                            </a:rPr>
+                            <m:t> </m:t>
+                          </m:r>
+                          <m:r>
+                            <m:rPr>
+                              <m:nor/>
+                            </m:rPr>
+                            <a:rPr lang="en-NO" sz="1100">
+                              <a:solidFill>
+                                <a:srgbClr val="8B949E"/>
+                              </a:solidFill>
+                              <a:latin typeface="Calibri" pitchFamily="34" charset="0"/>
+                              <a:ea typeface="Calibri" pitchFamily="34" charset="-122"/>
+                              <a:cs typeface="Calibri" pitchFamily="34" charset="-120"/>
+                            </a:rPr>
+                            <m:t>the</m:t>
+                          </m:r>
+                          <m:r>
+                            <m:rPr>
+                              <m:nor/>
+                            </m:rPr>
+                            <a:rPr lang="en-NO" sz="1100">
+                              <a:solidFill>
+                                <a:srgbClr val="8B949E"/>
+                              </a:solidFill>
+                              <a:latin typeface="Calibri" pitchFamily="34" charset="0"/>
+                              <a:ea typeface="Calibri" pitchFamily="34" charset="-122"/>
+                              <a:cs typeface="Calibri" pitchFamily="34" charset="-120"/>
+                            </a:rPr>
+                            <m:t> </m:t>
+                          </m:r>
+                          <m:r>
+                            <m:rPr>
+                              <m:nor/>
+                            </m:rPr>
+                            <a:rPr lang="en-NO" sz="1100">
+                              <a:solidFill>
+                                <a:srgbClr val="8B949E"/>
+                              </a:solidFill>
+                              <a:latin typeface="Calibri" pitchFamily="34" charset="0"/>
+                              <a:ea typeface="Calibri" pitchFamily="34" charset="-122"/>
+                              <a:cs typeface="Calibri" pitchFamily="34" charset="-120"/>
+                            </a:rPr>
+                            <m:t>square</m:t>
+                          </m:r>
+                        </m:den>
+                      </m:f>
+                      <m:r>
+                        <a:rPr lang="nb-NO" sz="1100">
+                          <a:solidFill>
+                            <a:srgbClr val="8B949E"/>
+                          </a:solidFill>
+                          <a:latin typeface="Calibri" pitchFamily="34" charset="0"/>
+                          <a:ea typeface="Calibri" pitchFamily="34" charset="-122"/>
+                          <a:cs typeface="Calibri" pitchFamily="34" charset="-120"/>
+                        </a:rPr>
+                        <m:t> = </m:t>
+                      </m:r>
+                      <m:f>
+                        <m:fPr>
+                          <m:ctrlPr>
+                            <a:rPr lang="en-NO" sz="1100">
+                              <a:solidFill>
+                                <a:srgbClr val="8B949E"/>
+                              </a:solidFill>
+                              <a:latin typeface="Calibri" pitchFamily="34" charset="0"/>
+                              <a:ea typeface="Calibri" pitchFamily="34" charset="-122"/>
+                              <a:cs typeface="Calibri" pitchFamily="34" charset="-120"/>
+                            </a:rPr>
+                          </m:ctrlPr>
+                        </m:fPr>
+                        <m:num>
+                          <m:r>
+                            <a:rPr lang="en-NO" sz="1100">
+                              <a:solidFill>
+                                <a:srgbClr val="8B949E"/>
+                              </a:solidFill>
+                              <a:latin typeface="Calibri" pitchFamily="34" charset="0"/>
+                              <a:ea typeface="Calibri" pitchFamily="34" charset="-122"/>
+                              <a:cs typeface="Calibri" pitchFamily="34" charset="-120"/>
+                            </a:rPr>
+                            <m:t>𝜋</m:t>
+                          </m:r>
+                          <m:sSup>
+                            <m:sSupPr>
+                              <m:ctrlPr>
+                                <a:rPr lang="en-NO" sz="1100">
+                                  <a:solidFill>
+                                    <a:srgbClr val="8B949E"/>
+                                  </a:solidFill>
+                                  <a:latin typeface="Calibri" pitchFamily="34" charset="0"/>
+                                  <a:ea typeface="Calibri" pitchFamily="34" charset="-122"/>
+                                  <a:cs typeface="Calibri" pitchFamily="34" charset="-120"/>
+                                </a:rPr>
+                              </m:ctrlPr>
+                            </m:sSupPr>
+                            <m:e>
+                              <m:r>
+                                <m:rPr>
+                                  <m:sty m:val="p"/>
+                                </m:rPr>
+                                <a:rPr lang="nb-NO" sz="1100">
+                                  <a:solidFill>
+                                    <a:srgbClr val="8B949E"/>
+                                  </a:solidFill>
+                                  <a:latin typeface="Calibri" pitchFamily="34" charset="0"/>
+                                  <a:ea typeface="Calibri" pitchFamily="34" charset="-122"/>
+                                  <a:cs typeface="Calibri" pitchFamily="34" charset="-120"/>
+                                </a:rPr>
+                                <m:t>r</m:t>
+                              </m:r>
+                            </m:e>
+                            <m:sup>
+                              <m:r>
+                                <a:rPr lang="nb-NO" sz="1100">
+                                  <a:solidFill>
+                                    <a:srgbClr val="8B949E"/>
+                                  </a:solidFill>
+                                  <a:latin typeface="Calibri" pitchFamily="34" charset="0"/>
+                                  <a:ea typeface="Calibri" pitchFamily="34" charset="-122"/>
+                                  <a:cs typeface="Calibri" pitchFamily="34" charset="-120"/>
+                                </a:rPr>
+                                <m:t>2</m:t>
+                              </m:r>
+                            </m:sup>
+                          </m:sSup>
+                        </m:num>
+                        <m:den>
+                          <m:r>
+                            <a:rPr lang="nb-NO" sz="1100">
+                              <a:solidFill>
+                                <a:srgbClr val="8B949E"/>
+                              </a:solidFill>
+                              <a:latin typeface="Calibri" pitchFamily="34" charset="0"/>
+                              <a:ea typeface="Calibri" pitchFamily="34" charset="-122"/>
+                              <a:cs typeface="Calibri" pitchFamily="34" charset="-120"/>
+                            </a:rPr>
+                            <m:t>4</m:t>
+                          </m:r>
+                          <m:sSup>
+                            <m:sSupPr>
+                              <m:ctrlPr>
+                                <a:rPr lang="en-NO" sz="1100">
+                                  <a:solidFill>
+                                    <a:srgbClr val="8B949E"/>
+                                  </a:solidFill>
+                                  <a:latin typeface="Calibri" pitchFamily="34" charset="0"/>
+                                  <a:ea typeface="Calibri" pitchFamily="34" charset="-122"/>
+                                  <a:cs typeface="Calibri" pitchFamily="34" charset="-120"/>
+                                </a:rPr>
+                              </m:ctrlPr>
+                            </m:sSupPr>
+                            <m:e>
+                              <m:r>
+                                <m:rPr>
+                                  <m:sty m:val="p"/>
+                                </m:rPr>
+                                <a:rPr lang="nb-NO" sz="1100">
+                                  <a:solidFill>
+                                    <a:srgbClr val="8B949E"/>
+                                  </a:solidFill>
+                                  <a:latin typeface="Calibri" pitchFamily="34" charset="0"/>
+                                  <a:ea typeface="Calibri" pitchFamily="34" charset="-122"/>
+                                  <a:cs typeface="Calibri" pitchFamily="34" charset="-120"/>
+                                </a:rPr>
+                                <m:t>r</m:t>
+                              </m:r>
+                            </m:e>
+                            <m:sup>
+                              <m:r>
+                                <a:rPr lang="nb-NO" sz="1100" b="0" i="0" smtClean="0">
+                                  <a:solidFill>
+                                    <a:srgbClr val="8B949E"/>
+                                  </a:solidFill>
+                                  <a:latin typeface="Cambria Math" panose="02040503050406030204" pitchFamily="18" charset="0"/>
+                                  <a:ea typeface="Calibri" pitchFamily="34" charset="-122"/>
+                                  <a:cs typeface="Calibri" pitchFamily="34" charset="-120"/>
+                                </a:rPr>
+                                <m:t>2</m:t>
+                              </m:r>
+                            </m:sup>
+                          </m:sSup>
+                        </m:den>
+                      </m:f>
+                      <m:r>
+                        <a:rPr lang="nb-NO" sz="1100">
+                          <a:solidFill>
+                            <a:srgbClr val="8B949E"/>
+                          </a:solidFill>
+                          <a:latin typeface="Calibri" pitchFamily="34" charset="0"/>
+                          <a:ea typeface="Calibri" pitchFamily="34" charset="-122"/>
+                          <a:cs typeface="Calibri" pitchFamily="34" charset="-120"/>
+                        </a:rPr>
+                        <m:t> = </m:t>
+                      </m:r>
+                      <m:f>
+                        <m:fPr>
+                          <m:ctrlPr>
+                            <a:rPr lang="en-NO" sz="1100">
+                              <a:solidFill>
+                                <a:srgbClr val="8B949E"/>
+                              </a:solidFill>
+                              <a:latin typeface="Calibri" pitchFamily="34" charset="0"/>
+                              <a:ea typeface="Calibri" pitchFamily="34" charset="-122"/>
+                              <a:cs typeface="Calibri" pitchFamily="34" charset="-120"/>
+                            </a:rPr>
+                          </m:ctrlPr>
+                        </m:fPr>
+                        <m:num>
+                          <m:r>
+                            <a:rPr lang="en-NO" sz="1100">
+                              <a:solidFill>
+                                <a:srgbClr val="8B949E"/>
+                              </a:solidFill>
+                              <a:latin typeface="Calibri" pitchFamily="34" charset="0"/>
+                              <a:ea typeface="Calibri" pitchFamily="34" charset="-122"/>
+                              <a:cs typeface="Calibri" pitchFamily="34" charset="-120"/>
+                            </a:rPr>
+                            <m:t>𝜋</m:t>
+                          </m:r>
+                        </m:num>
+                        <m:den>
+                          <m:r>
+                            <a:rPr lang="nb-NO" sz="1100">
+                              <a:solidFill>
+                                <a:srgbClr val="8B949E"/>
+                              </a:solidFill>
+                              <a:latin typeface="Calibri" pitchFamily="34" charset="0"/>
+                              <a:ea typeface="Calibri" pitchFamily="34" charset="-122"/>
+                              <a:cs typeface="Calibri" pitchFamily="34" charset="-120"/>
+                            </a:rPr>
+                            <m:t>4</m:t>
+                          </m:r>
+                        </m:den>
+                      </m:f>
+                    </m:oMath>
+                  </m:oMathPara>
+                </a14:m>
+                <a:endParaRPr lang="en-NO" sz="1100" dirty="0">
+                  <a:solidFill>
+                    <a:srgbClr val="8B949E"/>
+                  </a:solidFill>
+                  <a:latin typeface="Calibri" pitchFamily="34" charset="0"/>
+                  <a:ea typeface="Calibri" pitchFamily="34" charset="-122"/>
+                  <a:cs typeface="Calibri" pitchFamily="34" charset="-120"/>
+                </a:endParaRPr>
+              </a:p>
+            </p:txBody>
+          </p:sp>
+        </mc:Choice>
+        <mc:Fallback>
+          <p:sp>
+            <p:nvSpPr>
+              <p:cNvPr id="1028" name="TextBox 1027">
+                <a:extLst>
+                  <a:ext uri="{FF2B5EF4-FFF2-40B4-BE49-F238E27FC236}">
+                    <a16:creationId xmlns:a16="http://schemas.microsoft.com/office/drawing/2014/main" id="{861F86CA-26DA-1F39-CB96-7627EE903C76}"/>
+                  </a:ext>
+                </a:extLst>
+              </p:cNvPr>
+              <p:cNvSpPr txBox="1">
+                <a:spLocks noRot="1" noChangeAspect="1" noMove="1" noResize="1" noEditPoints="1" noAdjustHandles="1" noChangeArrowheads="1" noChangeShapeType="1" noTextEdit="1"/>
+              </p:cNvSpPr>
+              <p:nvPr/>
+            </p:nvSpPr>
+            <p:spPr>
+              <a:xfrm>
+                <a:off x="5944414" y="3546308"/>
+                <a:ext cx="2650132" cy="367986"/>
+              </a:xfrm>
+              <a:prstGeom prst="rect">
+                <a:avLst/>
+              </a:prstGeom>
+              <a:blipFill>
+                <a:blip r:embed="rId4"/>
+                <a:stretch>
+                  <a:fillRect l="-1914" t="-10000" b="-20000"/>
+                </a:stretch>
+              </a:blipFill>
+            </p:spPr>
+            <p:txBody>
+              <a:bodyPr/>
+              <a:lstStyle/>
+              <a:p>
+                <a:r>
+                  <a:rPr lang="en-NO">
+                    <a:noFill/>
+                  </a:rPr>
+                  <a:t> </a:t>
+                </a:r>
+              </a:p>
+            </p:txBody>
+          </p:sp>
+        </mc:Fallback>
+      </mc:AlternateContent>
+      <mc:AlternateContent xmlns:mc="http://schemas.openxmlformats.org/markup-compatibility/2006">
+        <mc:Choice xmlns:a14="http://schemas.microsoft.com/office/drawing/2010/main" Requires="a14">
+          <p:sp>
+            <p:nvSpPr>
+              <p:cNvPr id="1029" name="TextBox 1028">
+                <a:extLst>
+                  <a:ext uri="{FF2B5EF4-FFF2-40B4-BE49-F238E27FC236}">
+                    <a16:creationId xmlns:a16="http://schemas.microsoft.com/office/drawing/2014/main" id="{3762E92C-194C-72FE-8EA0-E7E0282DD6C8}"/>
+                  </a:ext>
+                </a:extLst>
+              </p:cNvPr>
+              <p:cNvSpPr txBox="1"/>
+              <p:nvPr/>
+            </p:nvSpPr>
+            <p:spPr>
+              <a:xfrm>
+                <a:off x="5944414" y="4153993"/>
+                <a:ext cx="2650132" cy="351122"/>
+              </a:xfrm>
+              <a:prstGeom prst="rect">
+                <a:avLst/>
+              </a:prstGeom>
+              <a:noFill/>
+            </p:spPr>
+            <p:txBody>
+              <a:bodyPr wrap="square" lIns="0" tIns="0" rIns="0" bIns="0" rtlCol="0">
+                <a:spAutoFit/>
+              </a:bodyPr>
+              <a:lstStyle/>
+              <a:p>
+                <a:pPr/>
+                <a14:m>
+                  <m:oMathPara xmlns:m="http://schemas.openxmlformats.org/officeDocument/2006/math">
+                    <m:oMathParaPr>
+                      <m:jc m:val="left"/>
+                    </m:oMathParaPr>
+                    <m:oMath xmlns:m="http://schemas.openxmlformats.org/officeDocument/2006/math">
+                      <m:r>
+                        <a:rPr lang="nb-NO" sz="1100" i="1" smtClean="0">
+                          <a:solidFill>
+                            <a:srgbClr val="8B949E"/>
+                          </a:solidFill>
+                          <a:latin typeface="Cambria Math" panose="02040503050406030204" pitchFamily="18" charset="0"/>
+                          <a:ea typeface="Cambria Math" panose="02040503050406030204" pitchFamily="18" charset="0"/>
+                          <a:cs typeface="Calibri" pitchFamily="34" charset="-120"/>
+                        </a:rPr>
+                        <m:t>~</m:t>
+                      </m:r>
+                      <m:r>
+                        <m:rPr>
+                          <m:sty m:val="p"/>
+                        </m:rPr>
+                        <a:rPr lang="el-GR" sz="1100" i="1" smtClean="0">
+                          <a:solidFill>
+                            <a:srgbClr val="8B949E"/>
+                          </a:solidFill>
+                          <a:latin typeface="Cambria Math" panose="02040503050406030204" pitchFamily="18" charset="0"/>
+                          <a:ea typeface="Cambria Math" panose="02040503050406030204" pitchFamily="18" charset="0"/>
+                          <a:cs typeface="Calibri" pitchFamily="34" charset="-120"/>
+                        </a:rPr>
+                        <m:t>π</m:t>
+                      </m:r>
+                      <m:r>
+                        <a:rPr lang="nb-NO" sz="1100" b="0" i="0" smtClean="0">
+                          <a:solidFill>
+                            <a:srgbClr val="8B949E"/>
+                          </a:solidFill>
+                          <a:latin typeface="Cambria Math" panose="02040503050406030204" pitchFamily="18" charset="0"/>
+                          <a:ea typeface="Calibri" pitchFamily="34" charset="-122"/>
+                          <a:cs typeface="Calibri" pitchFamily="34" charset="-120"/>
+                        </a:rPr>
+                        <m:t>=4 * </m:t>
+                      </m:r>
+                      <m:f>
+                        <m:fPr>
+                          <m:ctrlPr>
+                            <a:rPr lang="en-NO" sz="1100">
+                              <a:solidFill>
+                                <a:srgbClr val="8B949E"/>
+                              </a:solidFill>
+                              <a:latin typeface="Calibri" pitchFamily="34" charset="0"/>
+                              <a:ea typeface="Calibri" pitchFamily="34" charset="-122"/>
+                              <a:cs typeface="Calibri" pitchFamily="34" charset="-120"/>
+                            </a:rPr>
+                          </m:ctrlPr>
+                        </m:fPr>
+                        <m:num>
+                          <m:r>
+                            <m:rPr>
+                              <m:sty m:val="p"/>
+                            </m:rPr>
+                            <a:rPr lang="en-GB" sz="1100" i="1">
+                              <a:solidFill>
+                                <a:srgbClr val="8B949E"/>
+                              </a:solidFill>
+                              <a:latin typeface="Calibri" pitchFamily="34" charset="0"/>
+                              <a:ea typeface="Calibri" pitchFamily="34" charset="-122"/>
+                              <a:cs typeface="Calibri" pitchFamily="34" charset="-120"/>
+                            </a:rPr>
+                            <m:t>points</m:t>
+                          </m:r>
+                          <m:r>
+                            <a:rPr lang="en-GB" sz="1100" i="1">
+                              <a:solidFill>
+                                <a:srgbClr val="8B949E"/>
+                              </a:solidFill>
+                              <a:latin typeface="Calibri" pitchFamily="34" charset="0"/>
+                              <a:ea typeface="Calibri" pitchFamily="34" charset="-122"/>
+                              <a:cs typeface="Calibri" pitchFamily="34" charset="-120"/>
+                            </a:rPr>
+                            <m:t> </m:t>
+                          </m:r>
+                          <m:r>
+                            <m:rPr>
+                              <m:sty m:val="p"/>
+                            </m:rPr>
+                            <a:rPr lang="en-GB" sz="1100" i="1">
+                              <a:solidFill>
+                                <a:srgbClr val="8B949E"/>
+                              </a:solidFill>
+                              <a:latin typeface="Calibri" pitchFamily="34" charset="0"/>
+                              <a:ea typeface="Calibri" pitchFamily="34" charset="-122"/>
+                              <a:cs typeface="Calibri" pitchFamily="34" charset="-120"/>
+                            </a:rPr>
+                            <m:t>generated</m:t>
+                          </m:r>
+                          <m:r>
+                            <a:rPr lang="en-GB" sz="1100" i="1">
+                              <a:solidFill>
+                                <a:srgbClr val="8B949E"/>
+                              </a:solidFill>
+                              <a:latin typeface="Calibri" pitchFamily="34" charset="0"/>
+                              <a:ea typeface="Calibri" pitchFamily="34" charset="-122"/>
+                              <a:cs typeface="Calibri" pitchFamily="34" charset="-120"/>
+                            </a:rPr>
+                            <m:t> </m:t>
+                          </m:r>
+                          <m:r>
+                            <m:rPr>
+                              <m:sty m:val="p"/>
+                            </m:rPr>
+                            <a:rPr lang="en-GB" sz="1100" i="1">
+                              <a:solidFill>
+                                <a:srgbClr val="8B949E"/>
+                              </a:solidFill>
+                              <a:latin typeface="Calibri" pitchFamily="34" charset="0"/>
+                              <a:ea typeface="Calibri" pitchFamily="34" charset="-122"/>
+                              <a:cs typeface="Calibri" pitchFamily="34" charset="-120"/>
+                            </a:rPr>
+                            <m:t>inside</m:t>
+                          </m:r>
+                          <m:r>
+                            <a:rPr lang="en-GB" sz="1100" i="1">
+                              <a:solidFill>
+                                <a:srgbClr val="8B949E"/>
+                              </a:solidFill>
+                              <a:latin typeface="Calibri" pitchFamily="34" charset="0"/>
+                              <a:ea typeface="Calibri" pitchFamily="34" charset="-122"/>
+                              <a:cs typeface="Calibri" pitchFamily="34" charset="-120"/>
+                            </a:rPr>
+                            <m:t> </m:t>
+                          </m:r>
+                          <m:r>
+                            <m:rPr>
+                              <m:sty m:val="p"/>
+                            </m:rPr>
+                            <a:rPr lang="en-GB" sz="1100" i="1">
+                              <a:solidFill>
+                                <a:srgbClr val="8B949E"/>
+                              </a:solidFill>
+                              <a:latin typeface="Calibri" pitchFamily="34" charset="0"/>
+                              <a:ea typeface="Calibri" pitchFamily="34" charset="-122"/>
+                              <a:cs typeface="Calibri" pitchFamily="34" charset="-120"/>
+                            </a:rPr>
+                            <m:t>the</m:t>
+                          </m:r>
+                          <m:r>
+                            <a:rPr lang="en-GB" sz="1100" i="1">
+                              <a:solidFill>
+                                <a:srgbClr val="8B949E"/>
+                              </a:solidFill>
+                              <a:latin typeface="Calibri" pitchFamily="34" charset="0"/>
+                              <a:ea typeface="Calibri" pitchFamily="34" charset="-122"/>
+                              <a:cs typeface="Calibri" pitchFamily="34" charset="-120"/>
+                            </a:rPr>
+                            <m:t> </m:t>
+                          </m:r>
+                          <m:r>
+                            <m:rPr>
+                              <m:sty m:val="p"/>
+                            </m:rPr>
+                            <a:rPr lang="en-GB" sz="1100" i="1">
+                              <a:solidFill>
+                                <a:srgbClr val="8B949E"/>
+                              </a:solidFill>
+                              <a:latin typeface="Calibri" pitchFamily="34" charset="0"/>
+                              <a:ea typeface="Calibri" pitchFamily="34" charset="-122"/>
+                              <a:cs typeface="Calibri" pitchFamily="34" charset="-120"/>
+                            </a:rPr>
+                            <m:t>circle</m:t>
+                          </m:r>
+                        </m:num>
+                        <m:den>
+                          <m:r>
+                            <m:rPr>
+                              <m:sty m:val="p"/>
+                            </m:rPr>
+                            <a:rPr lang="en-GB" sz="1100" i="1">
+                              <a:solidFill>
+                                <a:srgbClr val="8B949E"/>
+                              </a:solidFill>
+                              <a:latin typeface="Calibri" pitchFamily="34" charset="0"/>
+                              <a:ea typeface="Calibri" pitchFamily="34" charset="-122"/>
+                              <a:cs typeface="Calibri" pitchFamily="34" charset="-120"/>
+                            </a:rPr>
+                            <m:t>points</m:t>
+                          </m:r>
+                          <m:r>
+                            <a:rPr lang="en-GB" sz="1100" i="1">
+                              <a:solidFill>
+                                <a:srgbClr val="8B949E"/>
+                              </a:solidFill>
+                              <a:latin typeface="Calibri" pitchFamily="34" charset="0"/>
+                              <a:ea typeface="Calibri" pitchFamily="34" charset="-122"/>
+                              <a:cs typeface="Calibri" pitchFamily="34" charset="-120"/>
+                            </a:rPr>
+                            <m:t> </m:t>
+                          </m:r>
+                          <m:r>
+                            <m:rPr>
+                              <m:sty m:val="p"/>
+                            </m:rPr>
+                            <a:rPr lang="en-GB" sz="1100" i="1">
+                              <a:solidFill>
+                                <a:srgbClr val="8B949E"/>
+                              </a:solidFill>
+                              <a:latin typeface="Calibri" pitchFamily="34" charset="0"/>
+                              <a:ea typeface="Calibri" pitchFamily="34" charset="-122"/>
+                              <a:cs typeface="Calibri" pitchFamily="34" charset="-120"/>
+                            </a:rPr>
+                            <m:t>generated</m:t>
+                          </m:r>
+                          <m:r>
+                            <a:rPr lang="en-GB" sz="1100" i="1">
+                              <a:solidFill>
+                                <a:srgbClr val="8B949E"/>
+                              </a:solidFill>
+                              <a:latin typeface="Calibri" pitchFamily="34" charset="0"/>
+                              <a:ea typeface="Calibri" pitchFamily="34" charset="-122"/>
+                              <a:cs typeface="Calibri" pitchFamily="34" charset="-120"/>
+                            </a:rPr>
+                            <m:t> </m:t>
+                          </m:r>
+                          <m:r>
+                            <m:rPr>
+                              <m:sty m:val="p"/>
+                            </m:rPr>
+                            <a:rPr lang="en-GB" sz="1100" i="1">
+                              <a:solidFill>
+                                <a:srgbClr val="8B949E"/>
+                              </a:solidFill>
+                              <a:latin typeface="Calibri" pitchFamily="34" charset="0"/>
+                              <a:ea typeface="Calibri" pitchFamily="34" charset="-122"/>
+                              <a:cs typeface="Calibri" pitchFamily="34" charset="-120"/>
+                            </a:rPr>
+                            <m:t>inside</m:t>
+                          </m:r>
+                          <m:r>
+                            <a:rPr lang="en-GB" sz="1100" i="1">
+                              <a:solidFill>
+                                <a:srgbClr val="8B949E"/>
+                              </a:solidFill>
+                              <a:latin typeface="Calibri" pitchFamily="34" charset="0"/>
+                              <a:ea typeface="Calibri" pitchFamily="34" charset="-122"/>
+                              <a:cs typeface="Calibri" pitchFamily="34" charset="-120"/>
+                            </a:rPr>
+                            <m:t> </m:t>
+                          </m:r>
+                          <m:r>
+                            <m:rPr>
+                              <m:sty m:val="p"/>
+                            </m:rPr>
+                            <a:rPr lang="en-GB" sz="1100" i="1">
+                              <a:solidFill>
+                                <a:srgbClr val="8B949E"/>
+                              </a:solidFill>
+                              <a:latin typeface="Calibri" pitchFamily="34" charset="0"/>
+                              <a:ea typeface="Calibri" pitchFamily="34" charset="-122"/>
+                              <a:cs typeface="Calibri" pitchFamily="34" charset="-120"/>
+                            </a:rPr>
+                            <m:t>the</m:t>
+                          </m:r>
+                          <m:r>
+                            <a:rPr lang="en-GB" sz="1100" i="1">
+                              <a:solidFill>
+                                <a:srgbClr val="8B949E"/>
+                              </a:solidFill>
+                              <a:latin typeface="Calibri" pitchFamily="34" charset="0"/>
+                              <a:ea typeface="Calibri" pitchFamily="34" charset="-122"/>
+                              <a:cs typeface="Calibri" pitchFamily="34" charset="-120"/>
+                            </a:rPr>
+                            <m:t> </m:t>
+                          </m:r>
+                          <m:r>
+                            <m:rPr>
+                              <m:sty m:val="p"/>
+                            </m:rPr>
+                            <a:rPr lang="nb-NO" sz="1100" b="0" i="0" smtClean="0">
+                              <a:solidFill>
+                                <a:srgbClr val="8B949E"/>
+                              </a:solidFill>
+                              <a:latin typeface="Cambria Math" panose="02040503050406030204" pitchFamily="18" charset="0"/>
+                              <a:ea typeface="Calibri" pitchFamily="34" charset="-122"/>
+                              <a:cs typeface="Calibri" pitchFamily="34" charset="-120"/>
+                            </a:rPr>
+                            <m:t>square</m:t>
+                          </m:r>
+                        </m:den>
+                      </m:f>
+                    </m:oMath>
+                  </m:oMathPara>
+                </a14:m>
+                <a:endParaRPr lang="en-NO" sz="1100" dirty="0">
+                  <a:solidFill>
+                    <a:srgbClr val="8B949E"/>
+                  </a:solidFill>
+                  <a:latin typeface="Calibri" pitchFamily="34" charset="0"/>
+                  <a:ea typeface="Calibri" pitchFamily="34" charset="-122"/>
+                  <a:cs typeface="Calibri" pitchFamily="34" charset="-120"/>
+                </a:endParaRPr>
+              </a:p>
+            </p:txBody>
+          </p:sp>
+        </mc:Choice>
+        <mc:Fallback>
+          <p:sp>
+            <p:nvSpPr>
+              <p:cNvPr id="1029" name="TextBox 1028">
+                <a:extLst>
+                  <a:ext uri="{FF2B5EF4-FFF2-40B4-BE49-F238E27FC236}">
+                    <a16:creationId xmlns:a16="http://schemas.microsoft.com/office/drawing/2014/main" id="{3762E92C-194C-72FE-8EA0-E7E0282DD6C8}"/>
+                  </a:ext>
+                </a:extLst>
+              </p:cNvPr>
+              <p:cNvSpPr txBox="1">
+                <a:spLocks noRot="1" noChangeAspect="1" noMove="1" noResize="1" noEditPoints="1" noAdjustHandles="1" noChangeArrowheads="1" noChangeShapeType="1" noTextEdit="1"/>
+              </p:cNvSpPr>
+              <p:nvPr/>
+            </p:nvSpPr>
+            <p:spPr>
+              <a:xfrm>
+                <a:off x="5944414" y="4153993"/>
+                <a:ext cx="2650132" cy="351122"/>
+              </a:xfrm>
+              <a:prstGeom prst="rect">
+                <a:avLst/>
+              </a:prstGeom>
+              <a:blipFill>
+                <a:blip r:embed="rId5"/>
+                <a:stretch>
+                  <a:fillRect l="-1435" t="-3448" r="-1914" b="-20690"/>
+                </a:stretch>
+              </a:blipFill>
+            </p:spPr>
+            <p:txBody>
+              <a:bodyPr/>
+              <a:lstStyle/>
+              <a:p>
+                <a:r>
+                  <a:rPr lang="en-NO">
+                    <a:noFill/>
+                  </a:rPr>
+                  <a:t> </a:t>
+                </a:r>
+              </a:p>
+            </p:txBody>
+          </p:sp>
+        </mc:Fallback>
+      </mc:AlternateContent>
+      <p:sp>
+        <p:nvSpPr>
+          <p:cNvPr id="1037" name="Shape 4">
+            <a:extLst>
+              <a:ext uri="{FF2B5EF4-FFF2-40B4-BE49-F238E27FC236}">
+                <a16:creationId xmlns:a16="http://schemas.microsoft.com/office/drawing/2014/main" id="{F9718491-0307-5108-5117-9EC9B5A56711}"/>
+              </a:ext>
+            </a:extLst>
+          </p:cNvPr>
+          <p:cNvSpPr/>
+          <p:nvPr/>
+        </p:nvSpPr>
+        <p:spPr>
+          <a:xfrm>
+            <a:off x="7096402" y="1852642"/>
+            <a:ext cx="1497330" cy="1531031"/>
+          </a:xfrm>
+          <a:prstGeom prst="rect">
+            <a:avLst/>
+          </a:prstGeom>
+          <a:solidFill>
+            <a:schemeClr val="tx1">
+              <a:lumMod val="50000"/>
+              <a:lumOff val="50000"/>
+            </a:schemeClr>
+          </a:solidFill>
+          <a:ln w="12700">
+            <a:solidFill>
+              <a:schemeClr val="tx1">
+                <a:lumMod val="50000"/>
+                <a:lumOff val="50000"/>
+              </a:schemeClr>
+            </a:solidFill>
+            <a:prstDash val="solid"/>
+          </a:ln>
+          <a:effectLst>
+            <a:outerShdw blurRad="152400" dist="38100" dir="8100000" algn="bl" rotWithShape="0">
+              <a:srgbClr val="000000">
+                <a:alpha val="40000"/>
+              </a:srgbClr>
+            </a:outerShdw>
+          </a:effectLst>
+        </p:spPr>
+        <p:txBody>
+          <a:bodyPr/>
+          <a:lstStyle/>
+          <a:p>
+            <a:endParaRPr lang="en-NO" dirty="0">
+              <a:solidFill>
+                <a:schemeClr val="bg1"/>
+              </a:solidFill>
+            </a:endParaRPr>
+          </a:p>
+        </p:txBody>
+      </p:sp>
+      <p:pic>
+        <p:nvPicPr>
+          <p:cNvPr id="1036" name="Picture 1035">
+            <a:extLst>
+              <a:ext uri="{FF2B5EF4-FFF2-40B4-BE49-F238E27FC236}">
+                <a16:creationId xmlns:a16="http://schemas.microsoft.com/office/drawing/2014/main" id="{0EDE1A4B-E16E-DDB2-FDE6-8C2C829C145E}"/>
+              </a:ext>
+            </a:extLst>
+          </p:cNvPr>
+          <p:cNvPicPr>
+            <a:picLocks noChangeAspect="1"/>
+          </p:cNvPicPr>
+          <p:nvPr/>
+        </p:nvPicPr>
+        <p:blipFill>
+          <a:blip r:embed="rId6"/>
+          <a:stretch>
+            <a:fillRect/>
+          </a:stretch>
+        </p:blipFill>
+        <p:spPr>
+          <a:xfrm>
+            <a:off x="7225224" y="1998314"/>
+            <a:ext cx="1239686" cy="1239686"/>
+          </a:xfrm>
+          <a:prstGeom prst="rect">
+            <a:avLst/>
+          </a:prstGeom>
+        </p:spPr>
+      </p:pic>
+    </p:spTree>
+    <p:extLst>
+      <p:ext uri="{BB962C8B-B14F-4D97-AF65-F5344CB8AC3E}">
+        <p14:creationId xmlns:p14="http://schemas.microsoft.com/office/powerpoint/2010/main" val="2378852001"/>
+      </p:ext>
+    </p:extLst>
+  </p:cSld>
+  <p:clrMapOvr>
+    <a:masterClrMapping/>
+  </p:clrMapOvr>
+  <mc:AlternateContent xmlns:mc="http://schemas.openxmlformats.org/markup-compatibility/2006" xmlns:p14="http://schemas.microsoft.com/office/powerpoint/2010/main">
+    <mc:Choice Requires="p14">
+      <p:transition spd="slow">
+        <p14:prism isContent="1" isInverted="1"/>
+      </p:transition>
+    </mc:Choice>
+    <mc:Fallback xmlns="">
+      <p:transition spd="slow">
+        <p:fade/>
+      </p:transition>
+    </mc:Fallback>
+  </mc:AlternateContent>
+  <p:timing>
+    <p:tnLst>
+      <p:par>
+        <p:cTn id="1" dur="indefinite" restart="never" nodeType="tmRoot">
+          <p:childTnLst>
+            <p:seq concurrent="1" nextAc="seek">
+              <p:cTn id="2" dur="indefinite" nodeType="mainSeq">
+                <p:childTnLst>
+                  <p:par>
+                    <p:cTn id="3" fill="hold">
+                      <p:stCondLst>
+                        <p:cond delay="indefinite"/>
+                      </p:stCondLst>
+                      <p:childTnLst>
+                        <p:par>
+                          <p:cTn id="4" fill="hold">
+                            <p:stCondLst>
+                              <p:cond delay="0"/>
+                            </p:stCondLst>
+                            <p:childTnLst>
+                              <p:par>
+                                <p:cTn id="5" presetID="10" presetClass="entr" presetSubtype="0" fill="hold" nodeType="clickEffect">
+                                  <p:stCondLst>
+                                    <p:cond delay="0"/>
+                                  </p:stCondLst>
+                                  <p:childTnLst>
+                                    <p:set>
+                                      <p:cBhvr>
+                                        <p:cTn id="6" dur="1" fill="hold">
+                                          <p:stCondLst>
+                                            <p:cond delay="0"/>
+                                          </p:stCondLst>
+                                        </p:cTn>
+                                        <p:tgtEl>
+                                          <p:spTgt spid="1024"/>
+                                        </p:tgtEl>
+                                        <p:attrNameLst>
+                                          <p:attrName>style.visibility</p:attrName>
+                                        </p:attrNameLst>
+                                      </p:cBhvr>
+                                      <p:to>
+                                        <p:strVal val="visible"/>
+                                      </p:to>
+                                    </p:set>
+                                    <p:animEffect transition="in" filter="fade">
+                                      <p:cBhvr>
+                                        <p:cTn id="7" dur="500"/>
+                                        <p:tgtEl>
+                                          <p:spTgt spid="1024"/>
+                                        </p:tgtEl>
+                                      </p:cBhvr>
+                                    </p:animEffect>
+                                  </p:childTnLst>
+                                </p:cTn>
+                              </p:par>
+                            </p:childTnLst>
+                          </p:cTn>
+                        </p:par>
+                      </p:childTnLst>
+                    </p:cTn>
+                  </p:par>
+                  <p:par>
+                    <p:cTn id="8" fill="hold">
+                      <p:stCondLst>
+                        <p:cond delay="indefinite"/>
+                      </p:stCondLst>
+                      <p:childTnLst>
+                        <p:par>
+                          <p:cTn id="9" fill="hold">
+                            <p:stCondLst>
+                              <p:cond delay="0"/>
+                            </p:stCondLst>
+                            <p:childTnLst>
+                              <p:par>
+                                <p:cTn id="10" presetID="10" presetClass="entr" presetSubtype="0" fill="hold" grpId="0" nodeType="clickEffect">
+                                  <p:stCondLst>
+                                    <p:cond delay="0"/>
+                                  </p:stCondLst>
+                                  <p:childTnLst>
+                                    <p:set>
+                                      <p:cBhvr>
+                                        <p:cTn id="11" dur="1" fill="hold">
+                                          <p:stCondLst>
+                                            <p:cond delay="0"/>
+                                          </p:stCondLst>
+                                        </p:cTn>
+                                        <p:tgtEl>
+                                          <p:spTgt spid="1028"/>
+                                        </p:tgtEl>
+                                        <p:attrNameLst>
+                                          <p:attrName>style.visibility</p:attrName>
+                                        </p:attrNameLst>
+                                      </p:cBhvr>
+                                      <p:to>
+                                        <p:strVal val="visible"/>
+                                      </p:to>
+                                    </p:set>
+                                    <p:animEffect transition="in" filter="fade">
+                                      <p:cBhvr>
+                                        <p:cTn id="12" dur="500"/>
+                                        <p:tgtEl>
+                                          <p:spTgt spid="1028"/>
+                                        </p:tgtEl>
+                                      </p:cBhvr>
+                                    </p:animEffect>
+                                  </p:childTnLst>
+                                </p:cTn>
+                              </p:par>
+                            </p:childTnLst>
+                          </p:cTn>
+                        </p:par>
+                      </p:childTnLst>
+                    </p:cTn>
+                  </p:par>
+                  <p:par>
+                    <p:cTn id="13" fill="hold">
+                      <p:stCondLst>
+                        <p:cond delay="indefinite"/>
+                      </p:stCondLst>
+                      <p:childTnLst>
+                        <p:par>
+                          <p:cTn id="14" fill="hold">
+                            <p:stCondLst>
+                              <p:cond delay="0"/>
+                            </p:stCondLst>
+                            <p:childTnLst>
+                              <p:par>
+                                <p:cTn id="15" presetID="10" presetClass="entr" presetSubtype="0" fill="hold" grpId="0" nodeType="clickEffect">
+                                  <p:stCondLst>
+                                    <p:cond delay="0"/>
+                                  </p:stCondLst>
+                                  <p:childTnLst>
+                                    <p:set>
+                                      <p:cBhvr>
+                                        <p:cTn id="16" dur="1" fill="hold">
+                                          <p:stCondLst>
+                                            <p:cond delay="0"/>
+                                          </p:stCondLst>
+                                        </p:cTn>
+                                        <p:tgtEl>
+                                          <p:spTgt spid="1029"/>
+                                        </p:tgtEl>
+                                        <p:attrNameLst>
+                                          <p:attrName>style.visibility</p:attrName>
+                                        </p:attrNameLst>
+                                      </p:cBhvr>
+                                      <p:to>
+                                        <p:strVal val="visible"/>
+                                      </p:to>
+                                    </p:set>
+                                    <p:animEffect transition="in" filter="fade">
+                                      <p:cBhvr>
+                                        <p:cTn id="17" dur="500"/>
+                                        <p:tgtEl>
+                                          <p:spTgt spid="1029"/>
+                                        </p:tgtEl>
+                                      </p:cBhvr>
+                                    </p:animEffect>
+                                  </p:childTnLst>
+                                </p:cTn>
+                              </p:par>
+                            </p:childTnLst>
+                          </p:cTn>
+                        </p:par>
+                      </p:childTnLst>
+                    </p:cTn>
+                  </p:par>
+                </p:childTnLst>
+              </p:cTn>
+              <p:prevCondLst>
+                <p:cond evt="onPrev" delay="0">
+                  <p:tgtEl>
+                    <p:sldTgt/>
+                  </p:tgtEl>
+                </p:cond>
+              </p:prevCondLst>
+              <p:nextCondLst>
+                <p:cond evt="onNext" delay="0">
+                  <p:tgtEl>
+                    <p:sldTgt/>
+                  </p:tgtEl>
+                </p:cond>
+              </p:nextCondLst>
+            </p:seq>
+          </p:childTnLst>
+        </p:cTn>
+      </p:par>
+    </p:tnLst>
+    <p:bldLst>
+      <p:bldP spid="1028" grpId="0"/>
+      <p:bldP spid="1029" grpId="0"/>
+    </p:bldLst>
+  </p:timing>
 </p:sld>
 </file>
 
@@ -6818,13 +8495,13 @@
   <p:clrMapOvr>
     <a:masterClrMapping/>
   </p:clrMapOvr>
-  <mc:AlternateContent xmlns:mc="http://schemas.openxmlformats.org/markup-compatibility/2006">
-    <mc:Choice xmlns:p14="http://schemas.microsoft.com/office/powerpoint/2010/main" Requires="p14">
+  <mc:AlternateContent xmlns:mc="http://schemas.openxmlformats.org/markup-compatibility/2006" xmlns:p14="http://schemas.microsoft.com/office/powerpoint/2010/main">
+    <mc:Choice Requires="p14">
       <p:transition spd="slow">
         <p14:prism isContent="1" isInverted="1"/>
       </p:transition>
     </mc:Choice>
-    <mc:Fallback>
+    <mc:Fallback xmlns="">
       <p:transition spd="slow">
         <p:fade/>
       </p:transition>
@@ -8155,13 +9832,13 @@
   <p:clrMapOvr>
     <a:masterClrMapping/>
   </p:clrMapOvr>
-  <mc:AlternateContent xmlns:mc="http://schemas.openxmlformats.org/markup-compatibility/2006">
-    <mc:Choice xmlns:p14="http://schemas.microsoft.com/office/powerpoint/2010/main" Requires="p14">
+  <mc:AlternateContent xmlns:mc="http://schemas.openxmlformats.org/markup-compatibility/2006" xmlns:p14="http://schemas.microsoft.com/office/powerpoint/2010/main">
+    <mc:Choice Requires="p14">
       <p:transition spd="slow">
         <p14:prism isContent="1" isInverted="1"/>
       </p:transition>
     </mc:Choice>
-    <mc:Fallback>
+    <mc:Fallback xmlns="">
       <p:transition spd="slow">
         <p:fade/>
       </p:transition>
@@ -10718,13 +12395,13 @@
   <p:clrMapOvr>
     <a:masterClrMapping/>
   </p:clrMapOvr>
-  <mc:AlternateContent xmlns:mc="http://schemas.openxmlformats.org/markup-compatibility/2006">
-    <mc:Choice xmlns:p14="http://schemas.microsoft.com/office/powerpoint/2010/main" Requires="p14">
+  <mc:AlternateContent xmlns:mc="http://schemas.openxmlformats.org/markup-compatibility/2006" xmlns:p14="http://schemas.microsoft.com/office/powerpoint/2010/main">
+    <mc:Choice Requires="p14">
       <p:transition spd="slow">
         <p14:prism isContent="1" isInverted="1"/>
       </p:transition>
     </mc:Choice>
-    <mc:Fallback>
+    <mc:Fallback xmlns="">
       <p:transition spd="slow">
         <p:fade/>
       </p:transition>
@@ -12395,13 +14072,13 @@
   <p:clrMapOvr>
     <a:masterClrMapping/>
   </p:clrMapOvr>
-  <mc:AlternateContent xmlns:mc="http://schemas.openxmlformats.org/markup-compatibility/2006">
-    <mc:Choice xmlns:p14="http://schemas.microsoft.com/office/powerpoint/2010/main" Requires="p14">
+  <mc:AlternateContent xmlns:mc="http://schemas.openxmlformats.org/markup-compatibility/2006" xmlns:p14="http://schemas.microsoft.com/office/powerpoint/2010/main">
+    <mc:Choice Requires="p14">
       <p:transition spd="slow">
         <p14:prism isContent="1" isInverted="1"/>
       </p:transition>
     </mc:Choice>
-    <mc:Fallback>
+    <mc:Fallback xmlns="">
       <p:transition spd="slow">
         <p:fade/>
       </p:transition>
@@ -15767,13 +17444,13 @@
   <p:clrMapOvr>
     <a:masterClrMapping/>
   </p:clrMapOvr>
-  <mc:AlternateContent xmlns:mc="http://schemas.openxmlformats.org/markup-compatibility/2006">
-    <mc:Choice xmlns:p14="http://schemas.microsoft.com/office/powerpoint/2010/main" Requires="p14">
+  <mc:AlternateContent xmlns:mc="http://schemas.openxmlformats.org/markup-compatibility/2006" xmlns:p14="http://schemas.microsoft.com/office/powerpoint/2010/main">
+    <mc:Choice Requires="p14">
       <p:transition spd="slow">
         <p14:prism isContent="1" isInverted="1"/>
       </p:transition>
     </mc:Choice>
-    <mc:Fallback>
+    <mc:Fallback xmlns="">
       <p:transition spd="slow">
         <p:fade/>
       </p:transition>
@@ -18895,13 +20572,13 @@
   <p:clrMapOvr>
     <a:masterClrMapping/>
   </p:clrMapOvr>
-  <mc:AlternateContent xmlns:mc="http://schemas.openxmlformats.org/markup-compatibility/2006">
-    <mc:Choice xmlns:p14="http://schemas.microsoft.com/office/powerpoint/2010/main" Requires="p14">
+  <mc:AlternateContent xmlns:mc="http://schemas.openxmlformats.org/markup-compatibility/2006" xmlns:p14="http://schemas.microsoft.com/office/powerpoint/2010/main">
+    <mc:Choice Requires="p14">
       <p:transition spd="slow">
         <p14:prism isContent="1" isInverted="1"/>
       </p:transition>
     </mc:Choice>
-    <mc:Fallback>
+    <mc:Fallback xmlns="">
       <p:transition spd="slow">
         <p:fade/>
       </p:transition>
@@ -19729,7 +21406,7 @@
           <a:bodyPr/>
           <a:lstStyle/>
           <a:p>
-            <a:endParaRPr lang="en-NO"/>
+            <a:endParaRPr lang="en-NO" dirty="0"/>
           </a:p>
         </p:txBody>
       </p:sp>
@@ -20625,13 +22302,13 @@
   <p:clrMapOvr>
     <a:masterClrMapping/>
   </p:clrMapOvr>
-  <mc:AlternateContent xmlns:mc="http://schemas.openxmlformats.org/markup-compatibility/2006">
-    <mc:Choice xmlns:p14="http://schemas.microsoft.com/office/powerpoint/2010/main" Requires="p14">
+  <mc:AlternateContent xmlns:mc="http://schemas.openxmlformats.org/markup-compatibility/2006" xmlns:p14="http://schemas.microsoft.com/office/powerpoint/2010/main">
+    <mc:Choice Requires="p14">
       <p:transition spd="slow">
         <p14:prism isContent="1" isInverted="1"/>
       </p:transition>
     </mc:Choice>
-    <mc:Fallback>
+    <mc:Fallback xmlns="">
       <p:transition spd="slow">
         <p:fade/>
       </p:transition>
@@ -23028,13 +24705,13 @@
   <p:clrMapOvr>
     <a:masterClrMapping/>
   </p:clrMapOvr>
-  <mc:AlternateContent xmlns:mc="http://schemas.openxmlformats.org/markup-compatibility/2006">
-    <mc:Choice xmlns:p14="http://schemas.microsoft.com/office/powerpoint/2010/main" Requires="p14">
+  <mc:AlternateContent xmlns:mc="http://schemas.openxmlformats.org/markup-compatibility/2006" xmlns:p14="http://schemas.microsoft.com/office/powerpoint/2010/main">
+    <mc:Choice Requires="p14">
       <p:transition spd="slow">
         <p14:prism isContent="1" isInverted="1"/>
       </p:transition>
     </mc:Choice>
-    <mc:Fallback>
+    <mc:Fallback xmlns="">
       <p:transition spd="slow">
         <p:fade/>
       </p:transition>
